--- a/DBTUNING/ch33_결과캐시_PGA튜닝/ch33_결과캐시와PGA튜닝.pptx
+++ b/DBTUNING/ch33_결과캐시_PGA튜닝/ch33_결과캐시와PGA튜닝.pptx
@@ -5363,7 +5363,7 @@
                 </a:solidFill>
                 <a:latin typeface="맑은 고딕"/>
               </a:rPr>
-              <a:t>제19장</a:t>
+              <a:t>제ch33</a:t>
             </a:r>
           </a:p>
         </p:txBody>
@@ -13109,7 +13109,7 @@
                 </a:solidFill>
                 <a:latin typeface="맑은 고딕"/>
               </a:rPr>
-              <a:t>19장 핵심 정리</a:t>
+              <a:t>ch33 핵심 정리</a:t>
             </a:r>
           </a:p>
         </p:txBody>
@@ -13627,7 +13627,7 @@
                 </a:solidFill>
                 <a:latin typeface="맑은 고딕"/>
               </a:rPr>
-              <a:t>19장의 두 문장</a:t>
+              <a:t>ch33의 두 문장</a:t>
             </a:r>
           </a:p>
         </p:txBody>
@@ -14164,7 +14164,7 @@
                 </a:solidFill>
                 <a:latin typeface="맑은 고딕"/>
               </a:rPr>
-              <a:t>•  버퍼 캐시(17장): '데이터 블록' 저장 → 물리 I/O 절감</a:t>
+              <a:t>•  버퍼 캐시(ch31): '데이터 블록' 저장 → 물리 I/O 절감</a:t>
             </a:r>
           </a:p>
           <a:p>
@@ -14180,7 +14180,7 @@
                 </a:solidFill>
                 <a:latin typeface="맑은 고딕"/>
               </a:rPr>
-              <a:t>•  라이브러리 캐시(18장): '실행계획' 저장 → 하드 파싱 절감</a:t>
+              <a:t>•  라이브러리 캐시(ch32): '실행계획' 저장 → 하드 파싱 절감</a:t>
             </a:r>
           </a:p>
           <a:p>
@@ -14196,7 +14196,7 @@
                 </a:solidFill>
                 <a:latin typeface="맑은 고딕"/>
               </a:rPr>
-              <a:t>•  결과 캐시(19장): '질의의 최종 결과' 저장 → 실행 자체 제거</a:t>
+              <a:t>•  결과 캐시(ch33): '질의의 최종 결과' 저장 → 실행 자체 제거</a:t>
             </a:r>
           </a:p>
           <a:p>

--- a/DBTUNING/ch33_결과캐시_PGA튜닝/ch33_결과캐시와PGA튜닝.pptx
+++ b/DBTUNING/ch33_결과캐시_PGA튜닝/ch33_결과캐시와PGA튜닝.pptx
@@ -5363,7 +5363,7 @@
                 </a:solidFill>
                 <a:latin typeface="맑은 고딕"/>
               </a:rPr>
-              <a:t>제ch33</a:t>
+              <a:t>ch33</a:t>
             </a:r>
           </a:p>
         </p:txBody>

--- a/DBTUNING/ch33_결과캐시_PGA튜닝/ch33_결과캐시와PGA튜닝.pptx
+++ b/DBTUNING/ch33_결과캐시_PGA튜닝/ch33_결과캐시와PGA튜닝.pptx
@@ -6557,7 +6557,7 @@
                 </a:solidFill>
                 <a:latin typeface="맑은 고딕"/>
               </a:rPr>
-              <a:t>19.4 ~ 19.5</a:t>
+              <a:t>33.4 ~ 33.5</a:t>
             </a:r>
           </a:p>
         </p:txBody>
@@ -6958,7 +6958,7 @@
                 </a:solidFill>
                 <a:latin typeface="맑은 고딕"/>
               </a:rPr>
-              <a:t>•  이 무효화가 축복이자 저주 — 잦으면 손해(19.6)</a:t>
+              <a:t>•  이 무효화가 축복이자 저주 — 잦으면 손해(33.6)</a:t>
             </a:r>
           </a:p>
         </p:txBody>
@@ -7762,7 +7762,7 @@
                 </a:solidFill>
                 <a:latin typeface="맑은 고딕"/>
               </a:rPr>
-              <a:t>19.6</a:t>
+              <a:t>33.6</a:t>
             </a:r>
           </a:p>
         </p:txBody>
@@ -8743,7 +8743,7 @@
                 </a:solidFill>
                 <a:latin typeface="맑은 고딕"/>
               </a:rPr>
-              <a:t>19.7 ~ 19.8</a:t>
+              <a:t>33.7 ~ 33.8</a:t>
             </a:r>
           </a:p>
         </p:txBody>
@@ -9492,7 +9492,7 @@
                 </a:solidFill>
                 <a:latin typeface="맑은 고딕"/>
               </a:rPr>
-              <a:t>19.9</a:t>
+              <a:t>33.9</a:t>
             </a:r>
           </a:p>
         </p:txBody>
@@ -10984,7 +10984,7 @@
                 </a:solidFill>
                 <a:latin typeface="맑은 고딕"/>
               </a:rPr>
-              <a:t>19.10</a:t>
+              <a:t>33.10</a:t>
             </a:r>
           </a:p>
         </p:txBody>
@@ -11270,7 +11270,7 @@
                 </a:solidFill>
                 <a:latin typeface="맑은 고딕"/>
               </a:rPr>
-              <a:t>•  19.2  결과 캐시란 무엇인가 — 서버·클라이언트</a:t>
+              <a:t>•  33.2  결과 캐시란 무엇인가 — 서버·클라이언트</a:t>
             </a:r>
           </a:p>
           <a:p>
@@ -11286,7 +11286,7 @@
                 </a:solidFill>
                 <a:latin typeface="맑은 고딕"/>
               </a:rPr>
-              <a:t>•  19.3  활성화와 RESULT_CACHE 힌트 · 요건과 제약</a:t>
+              <a:t>•  33.3  활성화와 RESULT_CACHE 힌트 · 요건과 제약</a:t>
             </a:r>
           </a:p>
           <a:p>
@@ -11302,7 +11302,7 @@
                 </a:solidFill>
                 <a:latin typeface="맑은 고딕"/>
               </a:rPr>
-              <a:t>•  19.4~19.5  무효화 · 모니터링(V$RESULT_CACHE_STATISTICS)</a:t>
+              <a:t>•  33.4~33.5  무효화 · 모니터링(V$RESULT_CACHE_STATISTICS)</a:t>
             </a:r>
           </a:p>
           <a:p>
@@ -11318,7 +11318,7 @@
                 </a:solidFill>
                 <a:latin typeface="맑은 고딕"/>
               </a:rPr>
-              <a:t>•  19.6  적용 부적합 판별 — 변경 잦은 테이블은 손해</a:t>
+              <a:t>•  33.6  적용 부적합 판별 — 변경 잦은 테이블은 손해</a:t>
             </a:r>
           </a:p>
           <a:p>
@@ -11334,7 +11334,7 @@
                 </a:solidFill>
                 <a:latin typeface="맑은 고딕"/>
               </a:rPr>
-              <a:t>•  19.7~19.8  PGA 작업 영역 · optimal/one-pass/multi-pass</a:t>
+              <a:t>•  33.7~33.8  PGA 작업 영역 · optimal/one-pass/multi-pass</a:t>
             </a:r>
           </a:p>
           <a:p>
@@ -11350,7 +11350,7 @@
                 </a:solidFill>
                 <a:latin typeface="맑은 고딕"/>
               </a:rPr>
-              <a:t>•  19.9  PGA 모니터링 — V$PGASTAT·작업 영역 히스토그램</a:t>
+              <a:t>•  33.9  PGA 모니터링 — V$PGASTAT·작업 영역 히스토그램</a:t>
             </a:r>
           </a:p>
           <a:p>
@@ -11366,7 +11366,7 @@
                 </a:solidFill>
                 <a:latin typeface="맑은 고딕"/>
               </a:rPr>
-              <a:t>•  19.10  1-pass·multi-pass 정렬 재현(세션 수준 축소)</a:t>
+              <a:t>•  33.10  1-pass·multi-pass 정렬 재현(세션 수준 축소)</a:t>
             </a:r>
           </a:p>
           <a:p>
@@ -11382,7 +11382,7 @@
                 </a:solidFill>
                 <a:latin typeface="맑은 고딕"/>
               </a:rPr>
-              <a:t>•  19.11  PGA_AGGREGATE_LIMIT — 절대 한도와 ORA-04036</a:t>
+              <a:t>•  33.11  PGA_AGGREGATE_LIMIT — 절대 한도와 ORA-04036</a:t>
             </a:r>
           </a:p>
         </p:txBody>
@@ -12074,7 +12074,7 @@
                 </a:solidFill>
                 <a:latin typeface="맑은 고딕"/>
               </a:rPr>
-              <a:t>19.11</a:t>
+              <a:t>33.11</a:t>
             </a:r>
           </a:p>
         </p:txBody>
@@ -13843,7 +13843,7 @@
                 </a:solidFill>
                 <a:latin typeface="맑은 고딕"/>
               </a:rPr>
-              <a:t>19.2</a:t>
+              <a:t>33.2</a:t>
             </a:r>
           </a:p>
         </p:txBody>
@@ -14993,7 +14993,7 @@
                 </a:solidFill>
                 <a:latin typeface="맑은 고딕"/>
               </a:rPr>
-              <a:t>19.3</a:t>
+              <a:t>33.3</a:t>
             </a:r>
           </a:p>
         </p:txBody>
